--- a/documents/insurance_capstone.pptx
+++ b/documents/insurance_capstone.pptx
@@ -1679,6 +1679,45 @@
       </p:grpSpPr>
       <p:sp>
         <p:nvSpPr>
+          <p:cNvPr id="35" name="Shape 15"/>
+          <p:cNvSpPr/>
+          <p:nvPr/>
+        </p:nvSpPr>
+        <p:spPr>
+          <a:xfrm>
+            <a:off x="7406640" y="2456688"/>
+            <a:ext cx="1417320" cy="384048"/>
+          </a:xfrm>
+          <a:prstGeom prst="rect">
+            <a:avLst/>
+          </a:prstGeom>
+          <a:solidFill>
+            <a:srgbClr val="FFFFFF"/>
+          </a:solidFill>
+          <a:ln w="19050">
+            <a:solidFill>
+              <a:srgbClr val="7B2FBE"/>
+            </a:solidFill>
+            <a:prstDash val="solid"/>
+          </a:ln>
+          <a:effectLst>
+            <a:outerShdw blurRad="50800" dist="25400" dir="8100000" algn="bl" rotWithShape="0">
+              <a:srgbClr val="000000">
+                <a:alpha val="8000"/>
+              </a:srgbClr>
+            </a:outerShdw>
+          </a:effectLst>
+        </p:spPr>
+        <p:txBody>
+          <a:bodyPr/>
+          <a:lstStyle/>
+          <a:p>
+            <a:endParaRPr lang="en-IN"/>
+          </a:p>
+        </p:txBody>
+      </p:sp>
+      <p:sp>
+        <p:nvSpPr>
           <p:cNvPr id="2" name="Shape 0"/>
           <p:cNvSpPr/>
           <p:nvPr/>
@@ -2627,17 +2666,78 @@
           <a:bodyPr wrap="square" rtlCol="0" anchor="ctr"/>
           <a:lstStyle/>
           <a:p>
-            <a:pPr marL="0" indent="0">
-              <a:buNone/>
-            </a:pPr>
             <a:r>
               <a:rPr lang="en-US" sz="1200" dirty="0">
                 <a:solidFill>
                   <a:srgbClr val="5D4E75"/>
                 </a:solidFill>
               </a:rPr>
-              <a:t>Clean Architecture  •  REST API
-Role-Based Access  •  Cloud Storage  •  PDF Generation</a:t>
+              <a:t>Clean Architecture  •  REST </a:t>
+            </a:r>
+            <a:r>
+              <a:rPr lang="en-US" sz="1200" dirty="0">
+                <a:solidFill>
+                  <a:srgbClr val="5D4E75"/>
+                </a:solidFill>
+              </a:rPr>
+              <a:t>API  </a:t>
+            </a:r>
+            <a:r>
+              <a:rPr lang="en-US" sz="1200" dirty="0" smtClean="0">
+                <a:solidFill>
+                  <a:srgbClr val="5D4E75"/>
+                </a:solidFill>
+              </a:rPr>
+              <a:t>•  </a:t>
+            </a:r>
+            <a:r>
+              <a:rPr lang="en-US" sz="1200" dirty="0">
+                <a:solidFill>
+                  <a:srgbClr val="5D4E75"/>
+                </a:solidFill>
+              </a:rPr>
+              <a:t>PDF Generation </a:t>
+            </a:r>
+            <a:r>
+              <a:rPr lang="en-US" sz="1200" dirty="0" smtClean="0">
+                <a:solidFill>
+                  <a:srgbClr val="5D4E75"/>
+                </a:solidFill>
+              </a:rPr>
+              <a:t> </a:t>
+            </a:r>
+            <a:r>
+              <a:rPr lang="en-US" sz="1200" dirty="0">
+                <a:solidFill>
+                  <a:srgbClr val="5D4E75"/>
+                </a:solidFill>
+              </a:rPr>
+              <a:t>•  </a:t>
+            </a:r>
+            <a:r>
+              <a:rPr lang="en-US" sz="1200" dirty="0" smtClean="0">
+                <a:solidFill>
+                  <a:srgbClr val="5D4E75"/>
+                </a:solidFill>
+              </a:rPr>
+              <a:t>N8N</a:t>
+            </a:r>
+            <a:r>
+              <a:rPr lang="en-US" sz="1200" dirty="0">
+                <a:solidFill>
+                  <a:srgbClr val="5D4E75"/>
+                </a:solidFill>
+              </a:rPr>
+              <a:t>
+Role-Based Access  •  Cloud Storage  </a:t>
+            </a:r>
+            <a:r>
+              <a:rPr lang="en-US" sz="1200" dirty="0" smtClean="0">
+                <a:solidFill>
+                  <a:srgbClr val="5D4E75"/>
+                </a:solidFill>
+              </a:rPr>
+              <a:t>• Video Verification</a:t>
             </a:r>
             <a:endParaRPr lang="en-US" sz="1200" dirty="0"/>
           </a:p>
@@ -2744,6 +2844,118 @@
               <a:t>CASUALTY &amp;</a:t>
             </a:r>
             <a:endParaRPr lang="en-US" sz="1600" dirty="0"/>
+          </a:p>
+        </p:txBody>
+      </p:sp>
+      <p:sp>
+        <p:nvSpPr>
+          <p:cNvPr id="32" name="Shape 21"/>
+          <p:cNvSpPr/>
+          <p:nvPr/>
+        </p:nvSpPr>
+        <p:spPr>
+          <a:xfrm>
+            <a:off x="5806440" y="2459736"/>
+            <a:ext cx="1417320" cy="384048"/>
+          </a:xfrm>
+          <a:prstGeom prst="rect">
+            <a:avLst/>
+          </a:prstGeom>
+          <a:solidFill>
+            <a:srgbClr val="FFFFFF"/>
+          </a:solidFill>
+          <a:ln w="19050">
+            <a:solidFill>
+              <a:srgbClr val="7B2FBE"/>
+            </a:solidFill>
+            <a:prstDash val="solid"/>
+          </a:ln>
+          <a:effectLst>
+            <a:outerShdw blurRad="50800" dist="25400" dir="8100000" algn="bl" rotWithShape="0">
+              <a:srgbClr val="000000">
+                <a:alpha val="8000"/>
+              </a:srgbClr>
+            </a:outerShdw>
+          </a:effectLst>
+        </p:spPr>
+        <p:txBody>
+          <a:bodyPr/>
+          <a:lstStyle/>
+          <a:p>
+            <a:pPr algn="ctr"/>
+            <a:endParaRPr lang="en-US" sz="1100" dirty="0"/>
+          </a:p>
+        </p:txBody>
+      </p:sp>
+      <p:sp>
+        <p:nvSpPr>
+          <p:cNvPr id="33" name="Text 22"/>
+          <p:cNvSpPr/>
+          <p:nvPr/>
+        </p:nvSpPr>
+        <p:spPr>
+          <a:xfrm>
+            <a:off x="5875020" y="2459736"/>
+            <a:ext cx="1325880" cy="384048"/>
+          </a:xfrm>
+          <a:prstGeom prst="rect">
+            <a:avLst/>
+          </a:prstGeom>
+          <a:noFill/>
+          <a:ln/>
+        </p:spPr>
+        <p:txBody>
+          <a:bodyPr wrap="square" rtlCol="0" anchor="ctr"/>
+          <a:lstStyle/>
+          <a:p>
+            <a:pPr marL="0" indent="0" algn="ctr">
+              <a:buNone/>
+            </a:pPr>
+            <a:r>
+              <a:rPr lang="en-US" sz="1100" b="1" dirty="0" smtClean="0">
+                <a:solidFill>
+                  <a:srgbClr val="1C0A3C"/>
+                </a:solidFill>
+              </a:rPr>
+              <a:t>Agora SDK</a:t>
+            </a:r>
+            <a:endParaRPr lang="en-US" sz="1100" dirty="0"/>
+          </a:p>
+        </p:txBody>
+      </p:sp>
+      <p:sp>
+        <p:nvSpPr>
+          <p:cNvPr id="34" name="Text 22"/>
+          <p:cNvSpPr/>
+          <p:nvPr/>
+        </p:nvSpPr>
+        <p:spPr>
+          <a:xfrm>
+            <a:off x="7452360" y="2459736"/>
+            <a:ext cx="1325880" cy="384048"/>
+          </a:xfrm>
+          <a:prstGeom prst="rect">
+            <a:avLst/>
+          </a:prstGeom>
+          <a:noFill/>
+          <a:ln/>
+        </p:spPr>
+        <p:txBody>
+          <a:bodyPr wrap="square" rtlCol="0" anchor="ctr"/>
+          <a:lstStyle/>
+          <a:p>
+            <a:pPr marL="0" indent="0" algn="ctr">
+              <a:buNone/>
+            </a:pPr>
+            <a:r>
+              <a:rPr lang="en-US" sz="1100" b="1" dirty="0" smtClean="0">
+                <a:solidFill>
+                  <a:srgbClr val="1C0A3C"/>
+                </a:solidFill>
+              </a:rPr>
+              <a:t>N8N</a:t>
+            </a:r>
+            <a:endParaRPr lang="en-US" sz="1100" dirty="0"/>
           </a:p>
         </p:txBody>
       </p:sp>
@@ -3652,12 +3864,20 @@
               <a:buNone/>
             </a:pPr>
             <a:r>
+              <a:rPr lang="en-US" sz="1000" dirty="0" smtClean="0">
+                <a:solidFill>
+                  <a:srgbClr val="5D4E75"/>
+                </a:solidFill>
+              </a:rPr>
+              <a:t>Video verifies the disaster, Reviews reason </a:t>
+            </a:r>
+            <a:r>
               <a:rPr lang="en-US" sz="1000" dirty="0">
                 <a:solidFill>
                   <a:srgbClr val="5D4E75"/>
                 </a:solidFill>
               </a:rPr>
-              <a:t>Reviews reason, payment history snapshots, and evidence document before deciding.</a:t>
+              <a:t>and evidence document before deciding.</a:t>
             </a:r>
             <a:endParaRPr lang="en-US" sz="1000" dirty="0"/>
           </a:p>
@@ -4514,7 +4734,39 @@
                   <a:srgbClr val="5D4E75"/>
                 </a:solidFill>
               </a:rPr>
-              <a:t>BasePremiumAmount &amp; BaseCoverageAmount copied into Policy at purchase — contracts immutable to future plan edits.</a:t>
+              <a:t>BasePremiumAmount </a:t>
+            </a:r>
+            <a:r>
+              <a:rPr lang="en-US" sz="1000" dirty="0" smtClean="0">
+                <a:solidFill>
+                  <a:srgbClr val="5D4E75"/>
+                </a:solidFill>
+              </a:rPr>
+              <a:t>&amp; BaseCoverageAmount </a:t>
+            </a:r>
+            <a:r>
+              <a:rPr lang="en-US" sz="1000" dirty="0">
+                <a:solidFill>
+                  <a:srgbClr val="5D4E75"/>
+                </a:solidFill>
+              </a:rPr>
+              <a:t>copied into Policy at purchase </a:t>
+            </a:r>
+            <a:r>
+              <a:rPr lang="en-US" sz="1000" dirty="0" smtClean="0">
+                <a:solidFill>
+                  <a:srgbClr val="5D4E75"/>
+                </a:solidFill>
+              </a:rPr>
+              <a:t>- </a:t>
+            </a:r>
+            <a:r>
+              <a:rPr lang="en-US" sz="1000" dirty="0">
+                <a:solidFill>
+                  <a:srgbClr val="5D4E75"/>
+                </a:solidFill>
+              </a:rPr>
+              <a:t>contracts immutable to future plan edits.</a:t>
             </a:r>
             <a:endParaRPr lang="en-US" sz="1000" dirty="0"/>
           </a:p>
@@ -4640,7 +4892,7 @@
               <a:buNone/>
             </a:pPr>
             <a:r>
-              <a:rPr lang="en-US" sz="1150" b="1" dirty="0">
+              <a:rPr lang="en-US" sz="1150" b="1" dirty="0" smtClean="0">
                 <a:solidFill>
                   <a:srgbClr val="1C0A3C"/>
                 </a:solidFill>
@@ -4676,12 +4928,28 @@
               <a:buNone/>
             </a:pPr>
             <a:r>
+              <a:rPr lang="en-US" sz="1000" dirty="0" smtClean="0">
+                <a:solidFill>
+                  <a:srgbClr val="5D4E75"/>
+                </a:solidFill>
+              </a:rPr>
+              <a:t>Every </a:t>
+            </a:r>
+            <a:r>
               <a:rPr lang="en-US" sz="1000" dirty="0">
                 <a:solidFill>
                   <a:srgbClr val="5D4E75"/>
                 </a:solidFill>
               </a:rPr>
-              <a:t>Every KYC and claim document is hashed on upload. Hash stored in DB for forensic verification.</a:t>
+              <a:t>document is hashed on upload. Hash stored in DB </a:t>
+            </a:r>
+            <a:r>
+              <a:rPr lang="en-US" sz="1000" dirty="0" smtClean="0">
+                <a:solidFill>
+                  <a:srgbClr val="5D4E75"/>
+                </a:solidFill>
+              </a:rPr>
+              <a:t>for verification.</a:t>
             </a:r>
             <a:endParaRPr lang="en-US" sz="1000" dirty="0"/>
           </a:p>
@@ -4812,7 +5080,15 @@
                   <a:srgbClr val="1C0A3C"/>
                 </a:solidFill>
               </a:rPr>
-              <a:t>Risk Score Engine</a:t>
+              <a:t>V</a:t>
+            </a:r>
+            <a:r>
+              <a:rPr lang="en-US" sz="1150" b="1" dirty="0" smtClean="0">
+                <a:solidFill>
+                  <a:srgbClr val="1C0A3C"/>
+                </a:solidFill>
+              </a:rPr>
+              <a:t>ideo Verification</a:t>
             </a:r>
             <a:endParaRPr lang="en-US" sz="1150" dirty="0"/>
           </a:p>
@@ -4839,16 +5115,17 @@
           <a:bodyPr wrap="square" rtlCol="0" anchor="ctr"/>
           <a:lstStyle/>
           <a:p>
-            <a:pPr marL="0" indent="0">
-              <a:buNone/>
-            </a:pPr>
-            <a:r>
-              <a:rPr lang="en-US" sz="1000" dirty="0">
-                <a:solidFill>
-                  <a:srgbClr val="5D4E75"/>
-                </a:solidFill>
-              </a:rPr>
-              <a:t>Computed from base volatility metric combined with chosen policy duration — drives agent underwriting decisions.</a:t>
+            <a:r>
+              <a:rPr lang="en-US" sz="1000" dirty="0" smtClean="0"/>
+              <a:t>Bridges </a:t>
+            </a:r>
+            <a:r>
+              <a:rPr lang="en-US" sz="1000" dirty="0"/>
+              <a:t>the Claims Officer and Customer through scheduled video verification using the Agora SDK</a:t>
+            </a:r>
+            <a:r>
+              <a:rPr lang="en-US" sz="1000" dirty="0" smtClean="0"/>
+              <a:t>.</a:t>
             </a:r>
             <a:endParaRPr lang="en-US" sz="1000" dirty="0"/>
           </a:p>
@@ -5018,12 +5295,20 @@
               <a:buNone/>
             </a:pPr>
             <a:r>
+              <a:rPr lang="en-US" sz="1000" dirty="0" smtClean="0">
+                <a:solidFill>
+                  <a:srgbClr val="5D4E75"/>
+                </a:solidFill>
+              </a:rPr>
+              <a:t>Claims Officers and Agents assigned </a:t>
+            </a:r>
+            <a:r>
               <a:rPr lang="en-US" sz="1000" dirty="0">
                 <a:solidFill>
                   <a:srgbClr val="5D4E75"/>
                 </a:solidFill>
               </a:rPr>
-              <a:t>ClaimOfficers assigned by least-queue algorithm ensuring balanced workloads across all officers.</a:t>
+              <a:t>by least-queue algorithm ensuring balanced workloads across all officers.</a:t>
             </a:r>
             <a:endParaRPr lang="en-US" sz="1000" dirty="0"/>
           </a:p>
@@ -5181,16 +5466,17 @@
           <a:bodyPr wrap="square" rtlCol="0" anchor="ctr"/>
           <a:lstStyle/>
           <a:p>
-            <a:pPr marL="0" indent="0">
-              <a:buNone/>
-            </a:pPr>
-            <a:r>
-              <a:rPr lang="en-US" sz="1000" dirty="0">
-                <a:solidFill>
-                  <a:srgbClr val="5D4E75"/>
-                </a:solidFill>
-              </a:rPr>
-              <a:t>QuestPDF invoked via background service — decoupled from request lifecycle. Policy, payment, and claim invoices.</a:t>
+            <a:r>
+              <a:rPr lang="en-US" sz="1000" dirty="0"/>
+              <a:t>QuestPDF is invoked via a background </a:t>
+            </a:r>
+            <a:r>
+              <a:rPr lang="en-US" sz="1000" dirty="0" smtClean="0"/>
+              <a:t>service - to </a:t>
+            </a:r>
+            <a:r>
+              <a:rPr lang="en-US" sz="1000" dirty="0"/>
+              <a:t>generate policy, payment, and claim invoices.</a:t>
             </a:r>
             <a:endParaRPr lang="en-US" sz="1000" dirty="0"/>
           </a:p>
@@ -5316,12 +5602,12 @@
               <a:buNone/>
             </a:pPr>
             <a:r>
-              <a:rPr lang="en-US" sz="1150" b="1" dirty="0">
+              <a:rPr lang="en-US" sz="1150" b="1" dirty="0" smtClean="0">
                 <a:solidFill>
                   <a:srgbClr val="1C0A3C"/>
                 </a:solidFill>
               </a:rPr>
-              <a:t>SignalR Real-Time Alerts</a:t>
+              <a:t>N8N based Mail Notifications</a:t>
             </a:r>
             <a:endParaRPr lang="en-US" sz="1150" dirty="0"/>
           </a:p>
@@ -5348,16 +5634,9 @@
           <a:bodyPr wrap="square" rtlCol="0" anchor="ctr"/>
           <a:lstStyle/>
           <a:p>
-            <a:pPr marL="0" indent="0">
-              <a:buNone/>
-            </a:pPr>
-            <a:r>
-              <a:rPr lang="en-US" sz="1000" dirty="0">
-                <a:solidFill>
-                  <a:srgbClr val="5D4E75"/>
-                </a:solidFill>
-              </a:rPr>
-              <a:t>WebSocket push notifications for every state transition — claim updates, payment confirmations, approvals.</a:t>
+            <a:r>
+              <a:rPr lang="en-US" sz="1000" dirty="0"/>
+              <a:t>An automated email is triggered via an n8n workflow whenever a policy is purchased.</a:t>
             </a:r>
             <a:endParaRPr lang="en-US" sz="1000" dirty="0"/>
           </a:p>
@@ -5710,16 +5989,86 @@
           <a:bodyPr wrap="square" rtlCol="0" anchor="ctr"/>
           <a:lstStyle/>
           <a:p>
-            <a:pPr marL="0" indent="0" algn="ctr">
-              <a:buNone/>
-            </a:pPr>
+            <a:pPr algn="ctr"/>
             <a:r>
               <a:rPr lang="en-US" sz="1000" dirty="0">
                 <a:solidFill>
                   <a:srgbClr val="A78CC0"/>
                 </a:solidFill>
               </a:rPr>
-              <a:t>.NET 9  •  Angular 19  •  SQL Server  •  QuestPDF  •  Vercel Blob  •  SignalR  •  JWT Auth</a:t>
+              <a:t>.NET </a:t>
+            </a:r>
+            <a:r>
+              <a:rPr lang="en-US" sz="1000" dirty="0" smtClean="0">
+                <a:solidFill>
+                  <a:srgbClr val="A78CC0"/>
+                </a:solidFill>
+              </a:rPr>
+              <a:t>8  </a:t>
+            </a:r>
+            <a:r>
+              <a:rPr lang="en-US" sz="1000" dirty="0">
+                <a:solidFill>
+                  <a:srgbClr val="A78CC0"/>
+                </a:solidFill>
+              </a:rPr>
+              <a:t>•  Angular </a:t>
+            </a:r>
+            <a:r>
+              <a:rPr lang="en-US" sz="1000" dirty="0" smtClean="0">
+                <a:solidFill>
+                  <a:srgbClr val="A78CC0"/>
+                </a:solidFill>
+              </a:rPr>
+              <a:t>21</a:t>
+            </a:r>
+            <a:r>
+              <a:rPr lang="en-US" sz="1000" dirty="0" smtClean="0">
+                <a:solidFill>
+                  <a:srgbClr val="A78CC0"/>
+                </a:solidFill>
+              </a:rPr>
+              <a:t>  </a:t>
+            </a:r>
+            <a:r>
+              <a:rPr lang="en-US" sz="1000" dirty="0">
+                <a:solidFill>
+                  <a:srgbClr val="A78CC0"/>
+                </a:solidFill>
+              </a:rPr>
+              <a:t>•  SQL Server  •  QuestPDF  •  Vercel Blob  •  SignalR  •  JWT </a:t>
+            </a:r>
+            <a:r>
+              <a:rPr lang="en-US" sz="1000" dirty="0" smtClean="0">
+                <a:solidFill>
+                  <a:srgbClr val="A78CC0"/>
+                </a:solidFill>
+              </a:rPr>
+              <a:t>Auth  </a:t>
+            </a:r>
+            <a:r>
+              <a:rPr lang="en-US" sz="1000" dirty="0" smtClean="0">
+                <a:solidFill>
+                  <a:srgbClr val="A78CC0"/>
+                </a:solidFill>
+              </a:rPr>
+              <a:t> </a:t>
+            </a:r>
+            <a:r>
+              <a:rPr lang="en-US" sz="1000" dirty="0">
+                <a:solidFill>
+                  <a:srgbClr val="A78CC0"/>
+                </a:solidFill>
+              </a:rPr>
+              <a:t>• </a:t>
+            </a:r>
+            <a:r>
+              <a:rPr lang="en-US" sz="1000" dirty="0" smtClean="0">
+                <a:solidFill>
+                  <a:srgbClr val="A78CC0"/>
+                </a:solidFill>
+              </a:rPr>
+              <a:t>N8N  •  Agora SDK  </a:t>
             </a:r>
             <a:endParaRPr lang="en-US" sz="1000" dirty="0"/>
           </a:p>
@@ -5809,7 +6158,15 @@
                   <a:schemeClr val="bg1"/>
                 </a:solidFill>
               </a:rPr>
-              <a:t>Hartford India , </a:t>
+              <a:t>Hartford </a:t>
+            </a:r>
+            <a:r>
+              <a:rPr lang="en-US" b="1" dirty="0" smtClean="0">
+                <a:solidFill>
+                  <a:schemeClr val="bg1"/>
+                </a:solidFill>
+              </a:rPr>
+              <a:t>India, </a:t>
             </a:r>
             <a:r>
               <a:rPr lang="en-US" b="1" dirty="0">
@@ -5950,11 +6307,6 @@
               </a:rPr>
               <a:t>. </a:t>
             </a:r>
-            <a:endParaRPr lang="en-US" dirty="0">
-              <a:solidFill>
-                <a:schemeClr val="bg1"/>
-              </a:solidFill>
-            </a:endParaRPr>
           </a:p>
         </p:txBody>
       </p:sp>
@@ -6297,7 +6649,7 @@
         </p:nvSpPr>
         <p:spPr>
           <a:xfrm>
-            <a:off x="365760" y="1810512"/>
+            <a:off x="406908" y="1833877"/>
             <a:ext cx="2468880" cy="1417320"/>
           </a:xfrm>
           <a:prstGeom prst="rect">
@@ -7394,8 +7746,8 @@
         </p:nvSpPr>
         <p:spPr>
           <a:xfrm>
-            <a:off x="804672" y="1339596"/>
-            <a:ext cx="2103120" cy="429768"/>
+            <a:off x="812761" y="1339596"/>
+            <a:ext cx="2258568" cy="429768"/>
           </a:xfrm>
           <a:prstGeom prst="rect">
             <a:avLst/>
@@ -7728,7 +8080,7 @@
         </p:nvSpPr>
         <p:spPr>
           <a:xfrm>
-            <a:off x="6748272" y="1261872"/>
+            <a:off x="6784144" y="1295405"/>
             <a:ext cx="2103120" cy="429768"/>
           </a:xfrm>
           <a:prstGeom prst="rect">
@@ -8070,7 +8422,7 @@
         </p:nvSpPr>
         <p:spPr>
           <a:xfrm>
-            <a:off x="3886200" y="3122676"/>
+            <a:off x="3963924" y="3186684"/>
             <a:ext cx="2103120" cy="429768"/>
           </a:xfrm>
           <a:prstGeom prst="rect">
@@ -8092,7 +8444,15 @@
                   <a:srgbClr val="1C0A3C"/>
                 </a:solidFill>
               </a:rPr>
-              <a:t>Scalable Architecture</a:t>
+              <a:t>V</a:t>
+            </a:r>
+            <a:r>
+              <a:rPr lang="en-US" sz="1150" b="1" dirty="0" smtClean="0">
+                <a:solidFill>
+                  <a:srgbClr val="1C0A3C"/>
+                </a:solidFill>
+              </a:rPr>
+              <a:t>ideo Verification</a:t>
             </a:r>
             <a:endParaRPr lang="en-US" sz="1150" dirty="0"/>
           </a:p>
@@ -8123,12 +8483,12 @@
               <a:buNone/>
             </a:pPr>
             <a:r>
-              <a:rPr lang="en-US" sz="1050" dirty="0">
+              <a:rPr lang="en-US" sz="1050" dirty="0" smtClean="0">
                 <a:solidFill>
                   <a:srgbClr val="5D4E75"/>
                 </a:solidFill>
               </a:rPr>
-              <a:t>Clean Architecture with separated layers — Domain, Application, Infrastructure, Presentation.</a:t>
+              <a:t>Agora based scheduled video verification before claim approval.</a:t>
             </a:r>
             <a:endParaRPr lang="en-US" sz="1050" dirty="0"/>
           </a:p>
@@ -8237,7 +8597,7 @@
         </p:nvSpPr>
         <p:spPr>
           <a:xfrm>
-            <a:off x="6766560" y="3108960"/>
+            <a:off x="6816852" y="3177540"/>
             <a:ext cx="2103120" cy="429768"/>
           </a:xfrm>
           <a:prstGeom prst="rect">
@@ -8887,7 +9247,47 @@
                   <a:srgbClr val="DDCCEE"/>
                 </a:solidFill>
               </a:rPr>
-              <a:t>• Repositories  • Vercel Blob  •  QuestPDF  •  SignalR  •  SQL Server</a:t>
+              <a:t>• Repositories  • Vercel Blob  •  </a:t>
+            </a:r>
+            <a:r>
+              <a:rPr lang="en-US" sz="1000" dirty="0" smtClean="0">
+                <a:solidFill>
+                  <a:srgbClr val="DDCCEE"/>
+                </a:solidFill>
+              </a:rPr>
+              <a:t>QuestPDF</a:t>
+            </a:r>
+            <a:r>
+              <a:rPr lang="en-US" sz="1000" dirty="0">
+                <a:solidFill>
+                  <a:srgbClr val="DDCCEE"/>
+                </a:solidFill>
+              </a:rPr>
+              <a:t> </a:t>
+            </a:r>
+            <a:r>
+              <a:rPr lang="en-US" sz="1000" dirty="0" smtClean="0">
+                <a:solidFill>
+                  <a:srgbClr val="DDCCEE"/>
+                </a:solidFill>
+              </a:rPr>
+              <a:t> •  Agora SDK </a:t>
+            </a:r>
+            <a:r>
+              <a:rPr lang="en-US" sz="1000" dirty="0" smtClean="0">
+                <a:solidFill>
+                  <a:srgbClr val="DDCCEE"/>
+                </a:solidFill>
+              </a:rPr>
+              <a:t>•  </a:t>
+            </a:r>
+            <a:r>
+              <a:rPr lang="en-US" sz="1000" dirty="0">
+                <a:solidFill>
+                  <a:srgbClr val="DDCCEE"/>
+                </a:solidFill>
+              </a:rPr>
+              <a:t>SignalR  •  SQL Server</a:t>
             </a:r>
             <a:endParaRPr lang="en-US" sz="1000" dirty="0"/>
           </a:p>
@@ -10774,12 +11174,8 @@
               <a:buNone/>
             </a:pPr>
             <a:r>
-              <a:rPr lang="en-US" sz="1050" dirty="0">
-                <a:solidFill>
-                  <a:srgbClr val="1C0A3C"/>
-                </a:solidFill>
-              </a:rPr>
-              <a:t>SHA-256 Integrity Hash</a:t>
+              <a:rPr lang="en-US" sz="1050" dirty="0" smtClean="0"/>
+              <a:t>Agora SDK</a:t>
             </a:r>
             <a:endParaRPr lang="en-US" sz="1050" dirty="0"/>
           </a:p>
@@ -10850,6 +11246,78 @@
               <a:t>Casualty &amp; Disaster Insurance Platform</a:t>
             </a:r>
             <a:endParaRPr lang="en-US" sz="1000" dirty="0"/>
+          </a:p>
+        </p:txBody>
+      </p:sp>
+      <p:sp>
+        <p:nvSpPr>
+          <p:cNvPr id="55" name="Shape 50"/>
+          <p:cNvSpPr/>
+          <p:nvPr/>
+        </p:nvSpPr>
+        <p:spPr>
+          <a:xfrm>
+            <a:off x="7004697" y="3277970"/>
+            <a:ext cx="146304" cy="146304"/>
+          </a:xfrm>
+          <a:prstGeom prst="line">
+            <a:avLst/>
+          </a:prstGeom>
+          <a:solidFill>
+            <a:srgbClr val="1A0533"/>
+          </a:solidFill>
+          <a:ln w="12700">
+            <a:solidFill>
+              <a:srgbClr val="1A0533"/>
+            </a:solidFill>
+            <a:prstDash val="solid"/>
+          </a:ln>
+        </p:spPr>
+        <p:txBody>
+          <a:bodyPr/>
+          <a:lstStyle/>
+          <a:p>
+            <a:endParaRPr lang="en-IN"/>
+          </a:p>
+        </p:txBody>
+      </p:sp>
+      <p:sp>
+        <p:nvSpPr>
+          <p:cNvPr id="56" name="Text 51"/>
+          <p:cNvSpPr/>
+          <p:nvPr/>
+        </p:nvSpPr>
+        <p:spPr>
+          <a:xfrm>
+            <a:off x="7210184" y="3200400"/>
+            <a:ext cx="1627632" cy="384048"/>
+          </a:xfrm>
+          <a:prstGeom prst="rect">
+            <a:avLst/>
+          </a:prstGeom>
+          <a:noFill/>
+          <a:ln/>
+        </p:spPr>
+        <p:txBody>
+          <a:bodyPr wrap="square" rtlCol="0" anchor="ctr"/>
+          <a:lstStyle/>
+          <a:p>
+            <a:pPr marL="0" indent="0">
+              <a:buNone/>
+            </a:pPr>
+            <a:r>
+              <a:rPr lang="en-US" sz="1050" dirty="0" smtClean="0"/>
+              <a:t>N8N based </a:t>
+            </a:r>
+            <a:r>
+              <a:rPr lang="en-US" sz="1050" dirty="0"/>
+              <a:t>m</a:t>
+            </a:r>
+            <a:r>
+              <a:rPr lang="en-US" sz="1050" dirty="0" smtClean="0"/>
+              <a:t>ail service</a:t>
+            </a:r>
+            <a:endParaRPr lang="en-US" sz="1050" dirty="0"/>
           </a:p>
         </p:txBody>
       </p:sp>
@@ -14475,12 +14943,20 @@
               <a:buNone/>
             </a:pPr>
             <a:r>
+              <a:rPr lang="en-US" sz="950" dirty="0" smtClean="0">
+                <a:solidFill>
+                  <a:srgbClr val="1E1B4B"/>
+                </a:solidFill>
+              </a:rPr>
+              <a:t>Verify </a:t>
+            </a:r>
+            <a:r>
               <a:rPr lang="en-US" sz="950" dirty="0">
                 <a:solidFill>
                   <a:srgbClr val="1E1B4B"/>
                 </a:solidFill>
               </a:rPr>
-              <a:t>View assigned claims</a:t>
+              <a:t>assigned claims</a:t>
             </a:r>
             <a:endParaRPr lang="en-US" sz="950" dirty="0"/>
           </a:p>
@@ -18008,7 +18484,103 @@
       </p:sp>
       <p:sp>
         <p:nvSpPr>
-          <p:cNvPr id="32" name="Shape 29"/>
+          <p:cNvPr id="34" name="Text 31"/>
+          <p:cNvSpPr/>
+          <p:nvPr/>
+        </p:nvSpPr>
+        <p:spPr>
+          <a:xfrm>
+            <a:off x="6254496" y="3118104"/>
+            <a:ext cx="402336" cy="402336"/>
+          </a:xfrm>
+          <a:prstGeom prst="rect">
+            <a:avLst/>
+          </a:prstGeom>
+          <a:noFill/>
+          <a:ln/>
+        </p:spPr>
+        <p:txBody>
+          <a:bodyPr wrap="square" rtlCol="0" anchor="ctr"/>
+          <a:lstStyle/>
+          <a:p>
+            <a:pPr marL="0" indent="0" algn="ctr">
+              <a:buNone/>
+            </a:pPr>
+            <a:endParaRPr lang="en-US" sz="1300" dirty="0"/>
+          </a:p>
+        </p:txBody>
+      </p:sp>
+      <p:sp>
+        <p:nvSpPr>
+          <p:cNvPr id="37" name="Shape 34"/>
+          <p:cNvSpPr/>
+          <p:nvPr/>
+        </p:nvSpPr>
+        <p:spPr>
+          <a:xfrm>
+            <a:off x="0" y="4800600"/>
+            <a:ext cx="9144000" cy="342900"/>
+          </a:xfrm>
+          <a:prstGeom prst="rect">
+            <a:avLst/>
+          </a:prstGeom>
+          <a:solidFill>
+            <a:srgbClr val="3B1A7A"/>
+          </a:solidFill>
+          <a:ln w="12700">
+            <a:solidFill>
+              <a:srgbClr val="3B1A7A"/>
+            </a:solidFill>
+            <a:prstDash val="solid"/>
+          </a:ln>
+        </p:spPr>
+        <p:txBody>
+          <a:bodyPr/>
+          <a:lstStyle/>
+          <a:p>
+            <a:endParaRPr lang="en-IN"/>
+          </a:p>
+        </p:txBody>
+      </p:sp>
+      <p:sp>
+        <p:nvSpPr>
+          <p:cNvPr id="38" name="Text 35"/>
+          <p:cNvSpPr/>
+          <p:nvPr/>
+        </p:nvSpPr>
+        <p:spPr>
+          <a:xfrm>
+            <a:off x="274320" y="4818888"/>
+            <a:ext cx="8595360" cy="301752"/>
+          </a:xfrm>
+          <a:prstGeom prst="rect">
+            <a:avLst/>
+          </a:prstGeom>
+          <a:noFill/>
+          <a:ln/>
+        </p:spPr>
+        <p:txBody>
+          <a:bodyPr wrap="square" lIns="0" tIns="0" rIns="0" bIns="0" rtlCol="0" anchor="ctr"/>
+          <a:lstStyle/>
+          <a:p>
+            <a:pPr marL="0" indent="0" algn="ctr">
+              <a:buNone/>
+            </a:pPr>
+            <a:r>
+              <a:rPr lang="en-US" sz="1000" dirty="0">
+                <a:solidFill>
+                  <a:srgbClr val="FFFFFF"/>
+                </a:solidFill>
+              </a:rPr>
+              <a:t>Casualty &amp; Disaster Insurance Platform</a:t>
+            </a:r>
+            <a:endParaRPr lang="en-US" sz="1000" dirty="0"/>
+          </a:p>
+        </p:txBody>
+      </p:sp>
+      <p:sp>
+        <p:nvSpPr>
+          <p:cNvPr id="43" name="Shape 37"/>
           <p:cNvSpPr/>
           <p:nvPr/>
         </p:nvSpPr>
@@ -18047,46 +18619,46 @@
       </p:sp>
       <p:sp>
         <p:nvSpPr>
-          <p:cNvPr id="33" name="Shape 30"/>
-          <p:cNvSpPr/>
-          <p:nvPr/>
-        </p:nvSpPr>
-        <p:spPr>
-          <a:xfrm>
-            <a:off x="6254496" y="3118104"/>
-            <a:ext cx="402336" cy="402336"/>
+          <p:cNvPr id="44" name="Shape 38"/>
+          <p:cNvSpPr/>
+          <p:nvPr/>
+        </p:nvSpPr>
+        <p:spPr>
+          <a:xfrm>
+            <a:off x="6254496" y="3077807"/>
+            <a:ext cx="438912" cy="438912"/>
           </a:xfrm>
           <a:prstGeom prst="line">
             <a:avLst/>
           </a:prstGeom>
           <a:solidFill>
-            <a:srgbClr val="1A0533"/>
+            <a:srgbClr val="2E0F4E"/>
           </a:solidFill>
           <a:ln w="12700">
             <a:solidFill>
-              <a:srgbClr val="1A0533"/>
-            </a:solidFill>
-            <a:prstDash val="solid"/>
-          </a:ln>
-        </p:spPr>
-        <p:txBody>
-          <a:bodyPr/>
-          <a:lstStyle/>
-          <a:p>
-            <a:endParaRPr lang="en-IN"/>
-          </a:p>
-        </p:txBody>
-      </p:sp>
-      <p:sp>
-        <p:nvSpPr>
-          <p:cNvPr id="34" name="Text 31"/>
-          <p:cNvSpPr/>
-          <p:nvPr/>
-        </p:nvSpPr>
-        <p:spPr>
-          <a:xfrm>
-            <a:off x="6254496" y="3118104"/>
-            <a:ext cx="402336" cy="402336"/>
+              <a:srgbClr val="2E0F4E"/>
+            </a:solidFill>
+            <a:prstDash val="solid"/>
+          </a:ln>
+        </p:spPr>
+        <p:txBody>
+          <a:bodyPr/>
+          <a:lstStyle/>
+          <a:p>
+            <a:endParaRPr lang="en-IN"/>
+          </a:p>
+        </p:txBody>
+      </p:sp>
+      <p:sp>
+        <p:nvSpPr>
+          <p:cNvPr id="45" name="Text 40"/>
+          <p:cNvSpPr/>
+          <p:nvPr/>
+        </p:nvSpPr>
+        <p:spPr>
+          <a:xfrm>
+            <a:off x="6739128" y="3099998"/>
+            <a:ext cx="1389888" cy="438912"/>
           </a:xfrm>
           <a:prstGeom prst="rect">
             <a:avLst/>
@@ -18098,31 +18670,31 @@
           <a:bodyPr wrap="square" rtlCol="0" anchor="ctr"/>
           <a:lstStyle/>
           <a:p>
-            <a:pPr marL="0" indent="0" algn="ctr">
-              <a:buNone/>
-            </a:pPr>
-            <a:r>
-              <a:rPr lang="en-US" sz="1300" b="1" dirty="0">
-                <a:solidFill>
-                  <a:srgbClr val="FFFFFF"/>
-                </a:solidFill>
-              </a:rPr>
-              <a:t>6</a:t>
-            </a:r>
-            <a:endParaRPr lang="en-US" sz="1300" dirty="0"/>
-          </a:p>
-        </p:txBody>
-      </p:sp>
-      <p:sp>
-        <p:nvSpPr>
-          <p:cNvPr id="35" name="Text 32"/>
-          <p:cNvSpPr/>
-          <p:nvPr/>
-        </p:nvSpPr>
-        <p:spPr>
-          <a:xfrm>
-            <a:off x="6739128" y="3099816"/>
-            <a:ext cx="2121408" cy="438912"/>
+            <a:pPr marL="0" indent="0">
+              <a:buNone/>
+            </a:pPr>
+            <a:r>
+              <a:rPr lang="en-US" sz="1100" b="1" dirty="0" smtClean="0">
+                <a:solidFill>
+                  <a:srgbClr val="1C0A3C"/>
+                </a:solidFill>
+              </a:rPr>
+              <a:t>Mail Triggered &amp; Invoice generated</a:t>
+            </a:r>
+            <a:endParaRPr lang="en-US" sz="1100" dirty="0"/>
+          </a:p>
+        </p:txBody>
+      </p:sp>
+      <p:sp>
+        <p:nvSpPr>
+          <p:cNvPr id="46" name="Text 41"/>
+          <p:cNvSpPr/>
+          <p:nvPr/>
+        </p:nvSpPr>
+        <p:spPr>
+          <a:xfrm>
+            <a:off x="6226615" y="3690455"/>
+            <a:ext cx="2414914" cy="841248"/>
           </a:xfrm>
           <a:prstGeom prst="rect">
             <a:avLst/>
@@ -18138,116 +18710,8 @@
               <a:buNone/>
             </a:pPr>
             <a:r>
-              <a:rPr lang="en-US" sz="1050" b="1" dirty="0">
-                <a:solidFill>
-                  <a:srgbClr val="1C0A3C"/>
-                </a:solidFill>
-              </a:rPr>
-              <a:t>Async Invoice Generation</a:t>
-            </a:r>
-            <a:endParaRPr lang="en-US" sz="1050" dirty="0"/>
-          </a:p>
-        </p:txBody>
-      </p:sp>
-      <p:sp>
-        <p:nvSpPr>
-          <p:cNvPr id="36" name="Text 33"/>
-          <p:cNvSpPr/>
-          <p:nvPr/>
-        </p:nvSpPr>
-        <p:spPr>
-          <a:xfrm>
-            <a:off x="6254496" y="3630168"/>
-            <a:ext cx="2596896" cy="960120"/>
-          </a:xfrm>
-          <a:prstGeom prst="rect">
-            <a:avLst/>
-          </a:prstGeom>
-          <a:noFill/>
-          <a:ln/>
-        </p:spPr>
-        <p:txBody>
-          <a:bodyPr wrap="square" rtlCol="0" anchor="ctr"/>
-          <a:lstStyle/>
-          <a:p>
-            <a:pPr marL="0" indent="0">
-              <a:buNone/>
-            </a:pPr>
-            <a:r>
-              <a:rPr lang="en-US" sz="1000" dirty="0">
-                <a:solidFill>
-                  <a:srgbClr val="5D4E75"/>
-                </a:solidFill>
-              </a:rPr>
-              <a:t>Background worker generates Policy Confirmation PDF + Payment Receipt PDF via QuestPDF → uploaded to Vercel Blob.</a:t>
-            </a:r>
-            <a:endParaRPr lang="en-US" sz="1000" dirty="0"/>
-          </a:p>
-        </p:txBody>
-      </p:sp>
-      <p:sp>
-        <p:nvSpPr>
-          <p:cNvPr id="37" name="Shape 34"/>
-          <p:cNvSpPr/>
-          <p:nvPr/>
-        </p:nvSpPr>
-        <p:spPr>
-          <a:xfrm>
-            <a:off x="0" y="4800600"/>
-            <a:ext cx="9144000" cy="342900"/>
-          </a:xfrm>
-          <a:prstGeom prst="rect">
-            <a:avLst/>
-          </a:prstGeom>
-          <a:solidFill>
-            <a:srgbClr val="3B1A7A"/>
-          </a:solidFill>
-          <a:ln w="12700">
-            <a:solidFill>
-              <a:srgbClr val="3B1A7A"/>
-            </a:solidFill>
-            <a:prstDash val="solid"/>
-          </a:ln>
-        </p:spPr>
-        <p:txBody>
-          <a:bodyPr/>
-          <a:lstStyle/>
-          <a:p>
-            <a:endParaRPr lang="en-IN"/>
-          </a:p>
-        </p:txBody>
-      </p:sp>
-      <p:sp>
-        <p:nvSpPr>
-          <p:cNvPr id="38" name="Text 35"/>
-          <p:cNvSpPr/>
-          <p:nvPr/>
-        </p:nvSpPr>
-        <p:spPr>
-          <a:xfrm>
-            <a:off x="274320" y="4818888"/>
-            <a:ext cx="8595360" cy="301752"/>
-          </a:xfrm>
-          <a:prstGeom prst="rect">
-            <a:avLst/>
-          </a:prstGeom>
-          <a:noFill/>
-          <a:ln/>
-        </p:spPr>
-        <p:txBody>
-          <a:bodyPr wrap="square" lIns="0" tIns="0" rIns="0" bIns="0" rtlCol="0" anchor="ctr"/>
-          <a:lstStyle/>
-          <a:p>
-            <a:pPr marL="0" indent="0" algn="ctr">
-              <a:buNone/>
-            </a:pPr>
-            <a:r>
-              <a:rPr lang="en-US" sz="1000" dirty="0">
-                <a:solidFill>
-                  <a:srgbClr val="FFFFFF"/>
-                </a:solidFill>
-              </a:rPr>
-              <a:t>Casualty &amp; Disaster Insurance Platform</a:t>
+              <a:rPr lang="en-US" sz="1000" dirty="0" smtClean="0"/>
+              <a:t>N8N triggers an email and invoice is generated using Quest PDF.</a:t>
             </a:r>
             <a:endParaRPr lang="en-US" sz="1000" dirty="0"/>
           </a:p>

--- a/documents/insurance_capstone.pptx
+++ b/documents/insurance_capstone.pptx
@@ -2351,15 +2351,7 @@
                   <a:srgbClr val="1C0A3C"/>
                 </a:solidFill>
               </a:rPr>
-              <a:t>Verte</a:t>
-            </a:r>
-            <a:r>
-              <a:rPr lang="en-US" sz="1100" b="1" dirty="0" smtClean="0">
-                <a:solidFill>
-                  <a:srgbClr val="1C0A3C"/>
-                </a:solidFill>
-              </a:rPr>
-              <a:t>x AI</a:t>
+              <a:t>Vertex AI</a:t>
             </a:r>
             <a:endParaRPr lang="en-US" sz="1100" dirty="0"/>
           </a:p>
@@ -2460,7 +2452,15 @@
                   <a:srgbClr val="5D4E75"/>
                 </a:solidFill>
               </a:rPr>
-              <a:t>Clean Architecture  •  REST API  </a:t>
+              <a:t>Clean Architecture  •  REST API  •  </a:t>
+            </a:r>
+            <a:r>
+              <a:rPr lang="en-US" sz="1200" dirty="0" smtClean="0">
+                <a:solidFill>
+                  <a:srgbClr val="5D4E75"/>
+                </a:solidFill>
+              </a:rPr>
+              <a:t>N8N  </a:t>
             </a:r>
             <a:r>
               <a:rPr lang="en-US" sz="1200" dirty="0">
@@ -2476,7 +2476,7 @@
                   <a:srgbClr val="5D4E75"/>
                 </a:solidFill>
               </a:rPr>
-              <a:t>N8N  </a:t>
+              <a:t>Vertex AI </a:t>
             </a:r>
             <a:r>
               <a:rPr lang="en-US" sz="1200" dirty="0">
@@ -2484,6 +2484,15 @@
                   <a:srgbClr val="5D4E75"/>
                 </a:solidFill>
               </a:rPr>
+              <a:t>
+Role-Based Access  •  Cloud Storage </a:t>
+            </a:r>
+            <a:r>
+              <a:rPr lang="en-US" sz="1200" dirty="0">
+                <a:solidFill>
+                  <a:srgbClr val="5D4E75"/>
+                </a:solidFill>
+              </a:rPr>
               <a:t>•  </a:t>
             </a:r>
             <a:r>
@@ -2492,16 +2501,7 @@
                   <a:srgbClr val="5D4E75"/>
                 </a:solidFill>
               </a:rPr>
-              <a:t>Vertex AI </a:t>
-            </a:r>
-            <a:r>
-              <a:rPr lang="en-US" sz="1200" dirty="0">
-                <a:solidFill>
-                  <a:srgbClr val="5D4E75"/>
-                </a:solidFill>
-              </a:rPr>
-              <a:t>
-Role-Based Access  •  Cloud Storage  </a:t>
+              <a:t>Google Cloud Platform </a:t>
             </a:r>
             <a:endParaRPr lang="en-US" sz="1200" dirty="0"/>
           </a:p>
@@ -3157,7 +3157,15 @@
                   <a:srgbClr val="A78CC0"/>
                 </a:solidFill>
               </a:rPr>
-              <a:t>Ambee API </a:t>
+              <a:t>Ambee API  </a:t>
+            </a:r>
+            <a:r>
+              <a:rPr lang="en-US" sz="1000" dirty="0">
+                <a:solidFill>
+                  <a:srgbClr val="A78CC0"/>
+                </a:solidFill>
+              </a:rPr>
+              <a:t>•  </a:t>
             </a:r>
             <a:r>
               <a:rPr lang="en-US" sz="1000" dirty="0" smtClean="0">
@@ -3165,31 +3173,7 @@
                   <a:srgbClr val="A78CC0"/>
                 </a:solidFill>
               </a:rPr>
-              <a:t> </a:t>
-            </a:r>
-            <a:r>
-              <a:rPr lang="en-US" sz="1000" dirty="0">
-                <a:solidFill>
-                  <a:srgbClr val="A78CC0"/>
-                </a:solidFill>
-              </a:rPr>
-              <a:t>•  </a:t>
-            </a:r>
-            <a:r>
-              <a:rPr lang="en-US" sz="1000" dirty="0" smtClean="0">
-                <a:solidFill>
-                  <a:srgbClr val="A78CC0"/>
-                </a:solidFill>
-              </a:rPr>
-              <a:t>Vertex Ai</a:t>
-            </a:r>
-            <a:r>
-              <a:rPr lang="en-US" sz="1000" dirty="0" smtClean="0">
-                <a:solidFill>
-                  <a:srgbClr val="A78CC0"/>
-                </a:solidFill>
-              </a:rPr>
-              <a:t>   </a:t>
+              <a:t>Vertex Ai   </a:t>
             </a:r>
             <a:r>
               <a:rPr lang="en-US" sz="1000" dirty="0">
@@ -3295,15 +3279,7 @@
                   <a:schemeClr val="bg1"/>
                 </a:solidFill>
               </a:rPr>
-              <a:t>Hartford </a:t>
-            </a:r>
-            <a:r>
-              <a:rPr lang="en-US" b="1" dirty="0" smtClean="0">
-                <a:solidFill>
-                  <a:schemeClr val="bg1"/>
-                </a:solidFill>
-              </a:rPr>
-              <a:t>India </a:t>
+              <a:t>Hartford India </a:t>
             </a:r>
             <a:r>
               <a:rPr lang="en-US" dirty="0" smtClean="0">
@@ -3351,39 +3327,18 @@
                   <a:schemeClr val="bg1"/>
                 </a:solidFill>
               </a:rPr>
-              <a:t>throughout </a:t>
-            </a:r>
+              <a:t>throughout the </a:t>
+            </a:r>
+          </a:p>
+          <a:p>
+            <a:pPr algn="ctr"/>
             <a:r>
               <a:rPr lang="en-US" dirty="0" smtClean="0">
                 <a:solidFill>
                   <a:schemeClr val="bg1"/>
                 </a:solidFill>
               </a:rPr>
-              <a:t>the </a:t>
-            </a:r>
-            <a:endParaRPr lang="en-US" dirty="0" smtClean="0">
-              <a:solidFill>
-                <a:schemeClr val="bg1"/>
-              </a:solidFill>
-            </a:endParaRPr>
-          </a:p>
-          <a:p>
-            <a:pPr algn="ctr"/>
-            <a:r>
-              <a:rPr lang="en-US" dirty="0" smtClean="0">
-                <a:solidFill>
-                  <a:schemeClr val="bg1"/>
-                </a:solidFill>
-              </a:rPr>
-              <a:t>training </a:t>
-            </a:r>
-            <a:r>
-              <a:rPr lang="en-US" dirty="0" smtClean="0">
-                <a:solidFill>
-                  <a:schemeClr val="bg1"/>
-                </a:solidFill>
-              </a:rPr>
-              <a:t>and development of </a:t>
+              <a:t>training and development of </a:t>
             </a:r>
             <a:r>
               <a:rPr lang="en-US" dirty="0">
@@ -4405,7 +4360,15 @@
                   <a:srgbClr val="1C0A3C"/>
                 </a:solidFill>
               </a:rPr>
-              <a:t>No Real-Time Notifications</a:t>
+              <a:t>No </a:t>
+            </a:r>
+            <a:r>
+              <a:rPr lang="en-US" sz="1200" b="1" dirty="0" smtClean="0">
+                <a:solidFill>
+                  <a:srgbClr val="1C0A3C"/>
+                </a:solidFill>
+              </a:rPr>
+              <a:t>Real-Time Video and Disaster verifications</a:t>
             </a:r>
             <a:endParaRPr lang="en-US" sz="1200" dirty="0"/>
           </a:p>
@@ -4441,7 +4404,63 @@
                   <a:srgbClr val="5D4E75"/>
                 </a:solidFill>
               </a:rPr>
-              <a:t>No instant alerts for critical events — customers discover updates only through manual follow-up.</a:t>
+              <a:t>No </a:t>
+            </a:r>
+            <a:r>
+              <a:rPr lang="en-US" sz="1100" dirty="0" smtClean="0">
+                <a:solidFill>
+                  <a:srgbClr val="5D4E75"/>
+                </a:solidFill>
+              </a:rPr>
+              <a:t>real time</a:t>
+            </a:r>
+            <a:r>
+              <a:rPr lang="en-US" sz="1100" dirty="0" smtClean="0">
+                <a:solidFill>
+                  <a:srgbClr val="5D4E75"/>
+                </a:solidFill>
+              </a:rPr>
+              <a:t> </a:t>
+            </a:r>
+            <a:r>
+              <a:rPr lang="en-US" sz="1100" dirty="0">
+                <a:solidFill>
+                  <a:srgbClr val="5D4E75"/>
+                </a:solidFill>
+              </a:rPr>
+              <a:t>events </a:t>
+            </a:r>
+            <a:r>
+              <a:rPr lang="en-US" sz="1100" dirty="0" smtClean="0">
+                <a:solidFill>
+                  <a:srgbClr val="5D4E75"/>
+                </a:solidFill>
+              </a:rPr>
+              <a:t>display —</a:t>
+            </a:r>
+            <a:r>
+              <a:rPr lang="en-US" sz="1100" dirty="0" smtClean="0">
+                <a:solidFill>
+                  <a:srgbClr val="5D4E75"/>
+                </a:solidFill>
+              </a:rPr>
+              <a:t> officers </a:t>
+            </a:r>
+            <a:r>
+              <a:rPr lang="en-US" sz="1100" dirty="0" smtClean="0">
+                <a:solidFill>
+                  <a:srgbClr val="5D4E75"/>
+                </a:solidFill>
+              </a:rPr>
+              <a:t>discover </a:t>
+            </a:r>
+            <a:r>
+              <a:rPr lang="en-US" sz="1100" dirty="0">
+                <a:solidFill>
+                  <a:srgbClr val="5D4E75"/>
+                </a:solidFill>
+              </a:rPr>
+              <a:t>updates only through manual follow-up.</a:t>
             </a:r>
             <a:endParaRPr lang="en-US" sz="1100" dirty="0"/>
           </a:p>
@@ -4942,7 +4961,15 @@
             </a:pPr>
             <a:r>
               <a:rPr lang="en-US" sz="1000" dirty="0" smtClean="0"/>
-              <a:t>Sand box api for pan and aadhaar verification.</a:t>
+              <a:t>Sand box api for </a:t>
+            </a:r>
+            <a:r>
+              <a:rPr lang="en-US" sz="1000" dirty="0" smtClean="0"/>
+              <a:t>pan, aadhaar and bank details </a:t>
+            </a:r>
+            <a:r>
+              <a:rPr lang="en-US" sz="1000" dirty="0" smtClean="0"/>
+              <a:t>verification.</a:t>
             </a:r>
             <a:endParaRPr lang="en-US" sz="1000" dirty="0"/>
           </a:p>
@@ -5316,15 +5343,15 @@
                   <a:srgbClr val="1C0A3C"/>
                 </a:solidFill>
               </a:rPr>
-              <a:t>Least Queue Claim </a:t>
-            </a:r>
-            <a:r>
-              <a:rPr lang="en-US" sz="1150" b="1" dirty="0">
+              <a:t>Least </a:t>
+            </a:r>
+            <a:r>
+              <a:rPr lang="en-US" sz="1150" b="1" dirty="0" smtClean="0">
                 <a:solidFill>
                   <a:srgbClr val="1C0A3C"/>
                 </a:solidFill>
               </a:rPr>
-              <a:t>Routing</a:t>
+              <a:t>Queue Algorithm</a:t>
             </a:r>
             <a:endParaRPr lang="en-US" sz="1150" dirty="0"/>
           </a:p>
@@ -5480,15 +5507,7 @@
                   <a:srgbClr val="1C0A3C"/>
                 </a:solidFill>
               </a:rPr>
-              <a:t>B</a:t>
-            </a:r>
-            <a:r>
-              <a:rPr lang="en-US" sz="1200" b="1" dirty="0" smtClean="0">
-                <a:solidFill>
-                  <a:srgbClr val="1C0A3C"/>
-                </a:solidFill>
-              </a:rPr>
-              <a:t>lob Storage</a:t>
+              <a:t>Blob Storage</a:t>
             </a:r>
             <a:endParaRPr lang="en-US" sz="1200" dirty="0"/>
           </a:p>
@@ -5615,7 +5634,7 @@
         </p:nvSpPr>
         <p:spPr>
           <a:xfrm>
-            <a:off x="6327648" y="3610646"/>
+            <a:off x="6336792" y="3576706"/>
             <a:ext cx="2011680" cy="429768"/>
           </a:xfrm>
           <a:prstGeom prst="rect">
@@ -5637,7 +5656,23 @@
                   <a:srgbClr val="1C0A3C"/>
                 </a:solidFill>
               </a:rPr>
-              <a:t>N8N Mail &amp; Razorpay</a:t>
+              <a:t>N8N Mail </a:t>
+            </a:r>
+            <a:r>
+              <a:rPr lang="en-US" sz="1150" b="1" dirty="0" smtClean="0">
+                <a:solidFill>
+                  <a:srgbClr val="1C0A3C"/>
+                </a:solidFill>
+              </a:rPr>
+              <a:t>Service &amp; </a:t>
+            </a:r>
+            <a:r>
+              <a:rPr lang="en-US" sz="1150" b="1" dirty="0" smtClean="0">
+                <a:solidFill>
+                  <a:srgbClr val="1C0A3C"/>
+                </a:solidFill>
+              </a:rPr>
+              <a:t>Razorpay</a:t>
             </a:r>
             <a:endParaRPr lang="en-US" sz="1150" dirty="0"/>
           </a:p>
@@ -5651,7 +5686,7 @@
         </p:nvSpPr>
         <p:spPr>
           <a:xfrm>
-            <a:off x="6336792" y="3845753"/>
+            <a:off x="6336792" y="3922186"/>
             <a:ext cx="2523744" cy="518684"/>
           </a:xfrm>
           <a:prstGeom prst="rect">
@@ -5666,8 +5701,21 @@
           <a:p>
             <a:r>
               <a:rPr lang="en-US" sz="1000" dirty="0"/>
-              <a:t>An automated email is triggered via an n8n workflow whenever a policy is purchased.</a:t>
-            </a:r>
+              <a:t>An automated email is triggered via an n8n workflow whenever a policy is </a:t>
+            </a:r>
+            <a:r>
+              <a:rPr lang="en-US" sz="1000" dirty="0" smtClean="0"/>
+              <a:t>purchased and </a:t>
+            </a:r>
+            <a:r>
+              <a:rPr lang="en-US" sz="1000" dirty="0" err="1" smtClean="0"/>
+              <a:t>razorpay</a:t>
+            </a:r>
+            <a:r>
+              <a:rPr lang="en-US" sz="1000" dirty="0" smtClean="0"/>
+              <a:t> is used as payment gateway.</a:t>
+            </a:r>
+            <a:endParaRPr lang="en-US" sz="1000" dirty="0"/>
           </a:p>
         </p:txBody>
       </p:sp>
@@ -5903,12 +5951,20 @@
               <a:buNone/>
             </a:pPr>
             <a:r>
+              <a:rPr lang="en-US" sz="1000" dirty="0" smtClean="0">
+                <a:solidFill>
+                  <a:srgbClr val="5D4E75"/>
+                </a:solidFill>
+              </a:rPr>
+              <a:t>BasePremium &amp; BaseCoverage copied </a:t>
+            </a:r>
+            <a:r>
               <a:rPr lang="en-US" sz="1000" dirty="0">
                 <a:solidFill>
                   <a:srgbClr val="5D4E75"/>
                 </a:solidFill>
               </a:rPr>
-              <a:t>BasePremiumAmount </a:t>
+              <a:t>into Policy at purchase </a:t>
             </a:r>
             <a:r>
               <a:rPr lang="en-US" sz="1000" dirty="0" smtClean="0">
@@ -5916,31 +5972,7 @@
                   <a:srgbClr val="5D4E75"/>
                 </a:solidFill>
               </a:rPr>
-              <a:t>&amp; BaseCoverageAmount </a:t>
-            </a:r>
-            <a:r>
-              <a:rPr lang="en-US" sz="1000" dirty="0">
-                <a:solidFill>
-                  <a:srgbClr val="5D4E75"/>
-                </a:solidFill>
-              </a:rPr>
-              <a:t>copied into Policy at purchase </a:t>
-            </a:r>
-            <a:r>
-              <a:rPr lang="en-US" sz="1000" dirty="0" smtClean="0">
-                <a:solidFill>
-                  <a:srgbClr val="5D4E75"/>
-                </a:solidFill>
-              </a:rPr>
-              <a:t>- </a:t>
-            </a:r>
-            <a:r>
-              <a:rPr lang="en-US" sz="1000" dirty="0" smtClean="0">
-                <a:solidFill>
-                  <a:srgbClr val="5D4E75"/>
-                </a:solidFill>
-              </a:rPr>
-              <a:t>immutable </a:t>
+              <a:t>- immutable </a:t>
             </a:r>
             <a:r>
               <a:rPr lang="en-US" sz="1000" dirty="0">
@@ -6128,7 +6160,7 @@
         </p:nvSpPr>
         <p:spPr>
           <a:xfrm>
-            <a:off x="6327648" y="2434352"/>
+            <a:off x="6327648" y="2390175"/>
             <a:ext cx="2011680" cy="429768"/>
           </a:xfrm>
           <a:prstGeom prst="rect">
@@ -6160,7 +6192,7 @@
         </p:nvSpPr>
         <p:spPr>
           <a:xfrm>
-            <a:off x="6327648" y="2839689"/>
+            <a:off x="6327648" y="2812594"/>
             <a:ext cx="2523744" cy="304557"/>
           </a:xfrm>
           <a:prstGeom prst="rect">
@@ -6175,11 +6207,31 @@
           <a:p>
             <a:r>
               <a:rPr lang="en-US" sz="1000" dirty="0" smtClean="0"/>
-              <a:t>AI agen</a:t>
+              <a:t>Multilingual AI </a:t>
             </a:r>
             <a:r>
               <a:rPr lang="en-US" sz="1000" dirty="0" smtClean="0"/>
-              <a:t>t call for customer to explain plans.</a:t>
+              <a:t>agent </a:t>
+            </a:r>
+            <a:r>
+              <a:rPr lang="en-US" sz="1000" dirty="0" smtClean="0"/>
+              <a:t>that explains</a:t>
+            </a:r>
+            <a:r>
+              <a:rPr lang="en-US" sz="1000" dirty="0" smtClean="0"/>
+              <a:t> about plan</a:t>
+            </a:r>
+            <a:r>
+              <a:rPr lang="en-US" sz="1000" dirty="0"/>
+              <a:t> </a:t>
+            </a:r>
+            <a:r>
+              <a:rPr lang="en-US" sz="1000" dirty="0" smtClean="0"/>
+              <a:t>and it’s</a:t>
+            </a:r>
+            <a:r>
+              <a:rPr lang="en-US" sz="1000" dirty="0" smtClean="0"/>
+              <a:t> benefits to the customer.</a:t>
             </a:r>
             <a:endParaRPr lang="en-US" sz="1000" dirty="0"/>
           </a:p>
@@ -6194,7 +6246,7 @@
         <p:spPr>
           <a:xfrm>
             <a:off x="3374136" y="1204512"/>
-            <a:ext cx="2011680" cy="429768"/>
+            <a:ext cx="2258568" cy="429768"/>
           </a:xfrm>
           <a:prstGeom prst="rect">
             <a:avLst/>
@@ -6211,7 +6263,11 @@
             </a:pPr>
             <a:r>
               <a:rPr lang="en-US" sz="1150" b="1" dirty="0" smtClean="0"/>
-              <a:t>Ambee API</a:t>
+              <a:t>Ambee </a:t>
+            </a:r>
+            <a:r>
+              <a:rPr lang="en-US" sz="1150" b="1" dirty="0" smtClean="0"/>
+              <a:t>API &amp; Geo Location API</a:t>
             </a:r>
             <a:endParaRPr lang="en-US" sz="1150" b="1" dirty="0"/>
           </a:p>
@@ -6225,7 +6281,7 @@
         </p:nvSpPr>
         <p:spPr>
           <a:xfrm>
-            <a:off x="3364992" y="1539614"/>
+            <a:off x="3384335" y="1600481"/>
             <a:ext cx="2523744" cy="502836"/>
           </a:xfrm>
           <a:prstGeom prst="rect">
@@ -6243,7 +6299,7 @@
             </a:pPr>
             <a:r>
               <a:rPr lang="en-US" sz="1000" dirty="0" smtClean="0"/>
-              <a:t>Disaster and location verification</a:t>
+              <a:t>Real time Disaster verification using ambee disaster api and location verification.</a:t>
             </a:r>
             <a:endParaRPr lang="en-US" sz="1000" dirty="0"/>
           </a:p>
@@ -6257,7 +6313,7 @@
         </p:nvSpPr>
         <p:spPr>
           <a:xfrm>
-            <a:off x="3374136" y="2434352"/>
+            <a:off x="3374136" y="2386136"/>
             <a:ext cx="2011680" cy="429768"/>
           </a:xfrm>
           <a:prstGeom prst="rect">
@@ -6289,7 +6345,7 @@
         </p:nvSpPr>
         <p:spPr>
           <a:xfrm>
-            <a:off x="3384335" y="2812594"/>
+            <a:off x="3377782" y="2839381"/>
             <a:ext cx="2523744" cy="331652"/>
           </a:xfrm>
           <a:prstGeom prst="rect">
@@ -6304,7 +6360,19 @@
           <a:p>
             <a:r>
               <a:rPr lang="en-US" sz="1000" dirty="0" smtClean="0"/>
-              <a:t>Claim summary and chatbot.</a:t>
+              <a:t>Claim </a:t>
+            </a:r>
+            <a:r>
+              <a:rPr lang="en-US" sz="1000" dirty="0" smtClean="0"/>
+              <a:t>summarization </a:t>
+            </a:r>
+            <a:r>
+              <a:rPr lang="en-US" sz="1000" dirty="0" smtClean="0"/>
+              <a:t>and </a:t>
+            </a:r>
+            <a:r>
+              <a:rPr lang="en-US" sz="1000" dirty="0" smtClean="0"/>
+              <a:t>chatbot assistant using default application setup locally.</a:t>
             </a:r>
             <a:endParaRPr lang="en-US" sz="1000" dirty="0"/>
           </a:p>
@@ -8900,11 +8968,7 @@
             </a:pPr>
             <a:r>
               <a:rPr lang="en-US" sz="1050" dirty="0" smtClean="0"/>
-              <a:t>Ambe</a:t>
-            </a:r>
-            <a:r>
-              <a:rPr lang="en-US" sz="1050" dirty="0" smtClean="0"/>
-              <a:t>e api</a:t>
+              <a:t>Ambee api</a:t>
             </a:r>
             <a:endParaRPr lang="en-US" sz="1050" dirty="0"/>
           </a:p>
